--- a/archive/old_docs/griffin-team-brief.pptx
+++ b/archive/old_docs/griffin-team-brief.pptx
@@ -316,7 +316,7 @@
           <a:p>
             <a:fld id="{5BCAD085-E8A6-8845-BD4E-CB4CCA059FC4}" type="datetimeFigureOut">
               <a:rPr lang="en-US" smtClean="0"/>
-              <a:t>3/31/2026</a:t>
+              <a:t>4/12/2026</a:t>
             </a:fld>
             <a:endParaRPr lang="en-US"/>
           </a:p>
@@ -484,7 +484,7 @@
           <a:p>
             <a:fld id="{5BCAD085-E8A6-8845-BD4E-CB4CCA059FC4}" type="datetimeFigureOut">
               <a:rPr lang="en-US" smtClean="0"/>
-              <a:t>3/31/2026</a:t>
+              <a:t>4/12/2026</a:t>
             </a:fld>
             <a:endParaRPr lang="en-US"/>
           </a:p>
@@ -662,7 +662,7 @@
           <a:p>
             <a:fld id="{5BCAD085-E8A6-8845-BD4E-CB4CCA059FC4}" type="datetimeFigureOut">
               <a:rPr lang="en-US" smtClean="0"/>
-              <a:t>3/31/2026</a:t>
+              <a:t>4/12/2026</a:t>
             </a:fld>
             <a:endParaRPr lang="en-US"/>
           </a:p>
@@ -830,7 +830,7 @@
           <a:p>
             <a:fld id="{5BCAD085-E8A6-8845-BD4E-CB4CCA059FC4}" type="datetimeFigureOut">
               <a:rPr lang="en-US" smtClean="0"/>
-              <a:t>3/31/2026</a:t>
+              <a:t>4/12/2026</a:t>
             </a:fld>
             <a:endParaRPr lang="en-US"/>
           </a:p>
@@ -1075,7 +1075,7 @@
           <a:p>
             <a:fld id="{5BCAD085-E8A6-8845-BD4E-CB4CCA059FC4}" type="datetimeFigureOut">
               <a:rPr lang="en-US" smtClean="0"/>
-              <a:t>3/31/2026</a:t>
+              <a:t>4/12/2026</a:t>
             </a:fld>
             <a:endParaRPr lang="en-US"/>
           </a:p>
@@ -1360,7 +1360,7 @@
           <a:p>
             <a:fld id="{5BCAD085-E8A6-8845-BD4E-CB4CCA059FC4}" type="datetimeFigureOut">
               <a:rPr lang="en-US" smtClean="0"/>
-              <a:t>3/31/2026</a:t>
+              <a:t>4/12/2026</a:t>
             </a:fld>
             <a:endParaRPr lang="en-US"/>
           </a:p>
@@ -1779,7 +1779,7 @@
           <a:p>
             <a:fld id="{5BCAD085-E8A6-8845-BD4E-CB4CCA059FC4}" type="datetimeFigureOut">
               <a:rPr lang="en-US" smtClean="0"/>
-              <a:t>3/31/2026</a:t>
+              <a:t>4/12/2026</a:t>
             </a:fld>
             <a:endParaRPr lang="en-US"/>
           </a:p>
@@ -1896,7 +1896,7 @@
           <a:p>
             <a:fld id="{5BCAD085-E8A6-8845-BD4E-CB4CCA059FC4}" type="datetimeFigureOut">
               <a:rPr lang="en-US" smtClean="0"/>
-              <a:t>3/31/2026</a:t>
+              <a:t>4/12/2026</a:t>
             </a:fld>
             <a:endParaRPr lang="en-US"/>
           </a:p>
@@ -1991,7 +1991,7 @@
           <a:p>
             <a:fld id="{5BCAD085-E8A6-8845-BD4E-CB4CCA059FC4}" type="datetimeFigureOut">
               <a:rPr lang="en-US" smtClean="0"/>
-              <a:t>3/31/2026</a:t>
+              <a:t>4/12/2026</a:t>
             </a:fld>
             <a:endParaRPr lang="en-US"/>
           </a:p>
@@ -2266,7 +2266,7 @@
           <a:p>
             <a:fld id="{5BCAD085-E8A6-8845-BD4E-CB4CCA059FC4}" type="datetimeFigureOut">
               <a:rPr lang="en-US" smtClean="0"/>
-              <a:t>3/31/2026</a:t>
+              <a:t>4/12/2026</a:t>
             </a:fld>
             <a:endParaRPr lang="en-US"/>
           </a:p>
@@ -2518,7 +2518,7 @@
           <a:p>
             <a:fld id="{5BCAD085-E8A6-8845-BD4E-CB4CCA059FC4}" type="datetimeFigureOut">
               <a:rPr lang="en-US" smtClean="0"/>
-              <a:t>3/31/2026</a:t>
+              <a:t>4/12/2026</a:t>
             </a:fld>
             <a:endParaRPr lang="en-US"/>
           </a:p>
@@ -2729,7 +2729,7 @@
           <a:p>
             <a:fld id="{5BCAD085-E8A6-8845-BD4E-CB4CCA059FC4}" type="datetimeFigureOut">
               <a:rPr lang="en-US" smtClean="0"/>
-              <a:t>3/31/2026</a:t>
+              <a:t>4/12/2026</a:t>
             </a:fld>
             <a:endParaRPr lang="en-US"/>
           </a:p>
@@ -19303,6 +19303,7 @@
           <a:lstStyle/>
           <a:p>
             <a:pPr algn="ctr"/>
+            <a:endParaRPr/>
           </a:p>
         </p:txBody>
       </p:sp>
@@ -19382,6 +19383,7 @@
           <a:lstStyle/>
           <a:p>
             <a:pPr algn="ctr"/>
+            <a:endParaRPr/>
           </a:p>
         </p:txBody>
       </p:sp>
@@ -19394,7 +19396,7 @@
         <p:spPr>
           <a:xfrm>
             <a:off x="685800" y="1033272"/>
-            <a:ext cx="5486400" cy="320040"/>
+            <a:ext cx="5486400" cy="292388"/>
           </a:xfrm>
           <a:prstGeom prst="rect">
             <a:avLst/>
@@ -19416,8 +19418,14 @@
               </a:defRPr>
             </a:pPr>
             <a:r>
+              <a:rPr dirty="0"/>
               <a:t>Infrastructure Lead</a:t>
             </a:r>
+            <a:r>
+              <a:rPr lang="en-US" dirty="0"/>
+              <a:t> - Anmol</a:t>
+            </a:r>
+            <a:endParaRPr dirty="0"/>
           </a:p>
         </p:txBody>
       </p:sp>
@@ -19548,6 +19556,7 @@
           <a:lstStyle/>
           <a:p>
             <a:pPr algn="ctr"/>
+            <a:endParaRPr/>
           </a:p>
         </p:txBody>
       </p:sp>
@@ -19560,7 +19569,7 @@
         <p:spPr>
           <a:xfrm>
             <a:off x="6172200" y="1033272"/>
-            <a:ext cx="5486400" cy="320040"/>
+            <a:ext cx="5486400" cy="292388"/>
           </a:xfrm>
           <a:prstGeom prst="rect">
             <a:avLst/>
@@ -19582,8 +19591,14 @@
               </a:defRPr>
             </a:pPr>
             <a:r>
+              <a:rPr dirty="0"/>
               <a:t>Research + Content Lead</a:t>
             </a:r>
+            <a:r>
+              <a:rPr lang="en-US" dirty="0"/>
+              <a:t> - Brynn</a:t>
+            </a:r>
+            <a:endParaRPr dirty="0"/>
           </a:p>
         </p:txBody>
       </p:sp>
@@ -19714,6 +19729,7 @@
           <a:lstStyle/>
           <a:p>
             <a:pPr algn="ctr"/>
+            <a:endParaRPr/>
           </a:p>
         </p:txBody>
       </p:sp>
@@ -19726,7 +19742,7 @@
         <p:spPr>
           <a:xfrm>
             <a:off x="685800" y="3319272"/>
-            <a:ext cx="5486400" cy="320040"/>
+            <a:ext cx="5486400" cy="292388"/>
           </a:xfrm>
           <a:prstGeom prst="rect">
             <a:avLst/>
@@ -19748,8 +19764,14 @@
               </a:defRPr>
             </a:pPr>
             <a:r>
+              <a:rPr dirty="0"/>
               <a:t>Design + Delivery Lead</a:t>
             </a:r>
+            <a:r>
+              <a:rPr lang="en-US" dirty="0"/>
+              <a:t> - JR</a:t>
+            </a:r>
+            <a:endParaRPr dirty="0"/>
           </a:p>
         </p:txBody>
       </p:sp>
@@ -19880,6 +19902,7 @@
           <a:lstStyle/>
           <a:p>
             <a:pPr algn="ctr"/>
+            <a:endParaRPr/>
           </a:p>
         </p:txBody>
       </p:sp>
@@ -20078,6 +20101,7 @@
           <a:lstStyle/>
           <a:p>
             <a:pPr algn="ctr"/>
+            <a:endParaRPr/>
           </a:p>
         </p:txBody>
       </p:sp>

--- a/archive/old_docs/griffin-team-brief.pptx
+++ b/archive/old_docs/griffin-team-brief.pptx
@@ -316,7 +316,7 @@
           <a:p>
             <a:fld id="{5BCAD085-E8A6-8845-BD4E-CB4CCA059FC4}" type="datetimeFigureOut">
               <a:rPr lang="en-US" smtClean="0"/>
-              <a:t>4/12/2026</a:t>
+              <a:t>3/31/2026</a:t>
             </a:fld>
             <a:endParaRPr lang="en-US"/>
           </a:p>
@@ -484,7 +484,7 @@
           <a:p>
             <a:fld id="{5BCAD085-E8A6-8845-BD4E-CB4CCA059FC4}" type="datetimeFigureOut">
               <a:rPr lang="en-US" smtClean="0"/>
-              <a:t>4/12/2026</a:t>
+              <a:t>3/31/2026</a:t>
             </a:fld>
             <a:endParaRPr lang="en-US"/>
           </a:p>
@@ -662,7 +662,7 @@
           <a:p>
             <a:fld id="{5BCAD085-E8A6-8845-BD4E-CB4CCA059FC4}" type="datetimeFigureOut">
               <a:rPr lang="en-US" smtClean="0"/>
-              <a:t>4/12/2026</a:t>
+              <a:t>3/31/2026</a:t>
             </a:fld>
             <a:endParaRPr lang="en-US"/>
           </a:p>
@@ -830,7 +830,7 @@
           <a:p>
             <a:fld id="{5BCAD085-E8A6-8845-BD4E-CB4CCA059FC4}" type="datetimeFigureOut">
               <a:rPr lang="en-US" smtClean="0"/>
-              <a:t>4/12/2026</a:t>
+              <a:t>3/31/2026</a:t>
             </a:fld>
             <a:endParaRPr lang="en-US"/>
           </a:p>
@@ -1075,7 +1075,7 @@
           <a:p>
             <a:fld id="{5BCAD085-E8A6-8845-BD4E-CB4CCA059FC4}" type="datetimeFigureOut">
               <a:rPr lang="en-US" smtClean="0"/>
-              <a:t>4/12/2026</a:t>
+              <a:t>3/31/2026</a:t>
             </a:fld>
             <a:endParaRPr lang="en-US"/>
           </a:p>
@@ -1360,7 +1360,7 @@
           <a:p>
             <a:fld id="{5BCAD085-E8A6-8845-BD4E-CB4CCA059FC4}" type="datetimeFigureOut">
               <a:rPr lang="en-US" smtClean="0"/>
-              <a:t>4/12/2026</a:t>
+              <a:t>3/31/2026</a:t>
             </a:fld>
             <a:endParaRPr lang="en-US"/>
           </a:p>
@@ -1779,7 +1779,7 @@
           <a:p>
             <a:fld id="{5BCAD085-E8A6-8845-BD4E-CB4CCA059FC4}" type="datetimeFigureOut">
               <a:rPr lang="en-US" smtClean="0"/>
-              <a:t>4/12/2026</a:t>
+              <a:t>3/31/2026</a:t>
             </a:fld>
             <a:endParaRPr lang="en-US"/>
           </a:p>
@@ -1896,7 +1896,7 @@
           <a:p>
             <a:fld id="{5BCAD085-E8A6-8845-BD4E-CB4CCA059FC4}" type="datetimeFigureOut">
               <a:rPr lang="en-US" smtClean="0"/>
-              <a:t>4/12/2026</a:t>
+              <a:t>3/31/2026</a:t>
             </a:fld>
             <a:endParaRPr lang="en-US"/>
           </a:p>
@@ -1991,7 +1991,7 @@
           <a:p>
             <a:fld id="{5BCAD085-E8A6-8845-BD4E-CB4CCA059FC4}" type="datetimeFigureOut">
               <a:rPr lang="en-US" smtClean="0"/>
-              <a:t>4/12/2026</a:t>
+              <a:t>3/31/2026</a:t>
             </a:fld>
             <a:endParaRPr lang="en-US"/>
           </a:p>
@@ -2266,7 +2266,7 @@
           <a:p>
             <a:fld id="{5BCAD085-E8A6-8845-BD4E-CB4CCA059FC4}" type="datetimeFigureOut">
               <a:rPr lang="en-US" smtClean="0"/>
-              <a:t>4/12/2026</a:t>
+              <a:t>3/31/2026</a:t>
             </a:fld>
             <a:endParaRPr lang="en-US"/>
           </a:p>
@@ -2518,7 +2518,7 @@
           <a:p>
             <a:fld id="{5BCAD085-E8A6-8845-BD4E-CB4CCA059FC4}" type="datetimeFigureOut">
               <a:rPr lang="en-US" smtClean="0"/>
-              <a:t>4/12/2026</a:t>
+              <a:t>3/31/2026</a:t>
             </a:fld>
             <a:endParaRPr lang="en-US"/>
           </a:p>
@@ -2729,7 +2729,7 @@
           <a:p>
             <a:fld id="{5BCAD085-E8A6-8845-BD4E-CB4CCA059FC4}" type="datetimeFigureOut">
               <a:rPr lang="en-US" smtClean="0"/>
-              <a:t>4/12/2026</a:t>
+              <a:t>3/31/2026</a:t>
             </a:fld>
             <a:endParaRPr lang="en-US"/>
           </a:p>
@@ -19303,7 +19303,6 @@
           <a:lstStyle/>
           <a:p>
             <a:pPr algn="ctr"/>
-            <a:endParaRPr/>
           </a:p>
         </p:txBody>
       </p:sp>
@@ -19383,7 +19382,6 @@
           <a:lstStyle/>
           <a:p>
             <a:pPr algn="ctr"/>
-            <a:endParaRPr/>
           </a:p>
         </p:txBody>
       </p:sp>
@@ -19396,7 +19394,7 @@
         <p:spPr>
           <a:xfrm>
             <a:off x="685800" y="1033272"/>
-            <a:ext cx="5486400" cy="292388"/>
+            <a:ext cx="5486400" cy="320040"/>
           </a:xfrm>
           <a:prstGeom prst="rect">
             <a:avLst/>
@@ -19418,14 +19416,8 @@
               </a:defRPr>
             </a:pPr>
             <a:r>
-              <a:rPr dirty="0"/>
               <a:t>Infrastructure Lead</a:t>
             </a:r>
-            <a:r>
-              <a:rPr lang="en-US" dirty="0"/>
-              <a:t> - Anmol</a:t>
-            </a:r>
-            <a:endParaRPr dirty="0"/>
           </a:p>
         </p:txBody>
       </p:sp>
@@ -19556,7 +19548,6 @@
           <a:lstStyle/>
           <a:p>
             <a:pPr algn="ctr"/>
-            <a:endParaRPr/>
           </a:p>
         </p:txBody>
       </p:sp>
@@ -19569,7 +19560,7 @@
         <p:spPr>
           <a:xfrm>
             <a:off x="6172200" y="1033272"/>
-            <a:ext cx="5486400" cy="292388"/>
+            <a:ext cx="5486400" cy="320040"/>
           </a:xfrm>
           <a:prstGeom prst="rect">
             <a:avLst/>
@@ -19591,14 +19582,8 @@
               </a:defRPr>
             </a:pPr>
             <a:r>
-              <a:rPr dirty="0"/>
               <a:t>Research + Content Lead</a:t>
             </a:r>
-            <a:r>
-              <a:rPr lang="en-US" dirty="0"/>
-              <a:t> - Brynn</a:t>
-            </a:r>
-            <a:endParaRPr dirty="0"/>
           </a:p>
         </p:txBody>
       </p:sp>
@@ -19729,7 +19714,6 @@
           <a:lstStyle/>
           <a:p>
             <a:pPr algn="ctr"/>
-            <a:endParaRPr/>
           </a:p>
         </p:txBody>
       </p:sp>
@@ -19742,7 +19726,7 @@
         <p:spPr>
           <a:xfrm>
             <a:off x="685800" y="3319272"/>
-            <a:ext cx="5486400" cy="292388"/>
+            <a:ext cx="5486400" cy="320040"/>
           </a:xfrm>
           <a:prstGeom prst="rect">
             <a:avLst/>
@@ -19764,14 +19748,8 @@
               </a:defRPr>
             </a:pPr>
             <a:r>
-              <a:rPr dirty="0"/>
               <a:t>Design + Delivery Lead</a:t>
             </a:r>
-            <a:r>
-              <a:rPr lang="en-US" dirty="0"/>
-              <a:t> - JR</a:t>
-            </a:r>
-            <a:endParaRPr dirty="0"/>
           </a:p>
         </p:txBody>
       </p:sp>
@@ -19902,7 +19880,6 @@
           <a:lstStyle/>
           <a:p>
             <a:pPr algn="ctr"/>
-            <a:endParaRPr/>
           </a:p>
         </p:txBody>
       </p:sp>
@@ -20101,7 +20078,6 @@
           <a:lstStyle/>
           <a:p>
             <a:pPr algn="ctr"/>
-            <a:endParaRPr/>
           </a:p>
         </p:txBody>
       </p:sp>
